--- a/koreatech-db/theory/이론6장_데이터베이스_설계_이론.pptx
+++ b/koreatech-db/theory/이론6장_데이터베이스_설계_이론.pptx
@@ -12017,9 +12017,9 @@
                 <a:solidFill>
                   <a:srgbClr val="7A869C"/>
                 </a:solidFill>
-                <a:latin typeface="나눔고딕코딩"/>
-                <a:ea typeface="나눔고딕코딩"/>
-                <a:cs typeface="나눔고딕코딩"/>
+                <a:latin typeface="D2Coding"/>
+                <a:ea typeface="D2Coding"/>
+                <a:cs typeface="D2Coding"/>
               </a:rPr>
               <a:t>1</a:t>
             </a:r>
@@ -12035,9 +12035,9 @@
                 <a:solidFill>
                   <a:srgbClr val="7A869C"/>
                 </a:solidFill>
-                <a:latin typeface="나눔고딕코딩"/>
-                <a:ea typeface="나눔고딕코딩"/>
-                <a:cs typeface="나눔고딕코딩"/>
+                <a:latin typeface="D2Coding"/>
+                <a:ea typeface="D2Coding"/>
+                <a:cs typeface="D2Coding"/>
               </a:rPr>
               <a:t>2</a:t>
             </a:r>
@@ -12053,9 +12053,9 @@
                 <a:solidFill>
                   <a:srgbClr val="7A869C"/>
                 </a:solidFill>
-                <a:latin typeface="나눔고딕코딩"/>
-                <a:ea typeface="나눔고딕코딩"/>
-                <a:cs typeface="나눔고딕코딩"/>
+                <a:latin typeface="D2Coding"/>
+                <a:ea typeface="D2Coding"/>
+                <a:cs typeface="D2Coding"/>
               </a:rPr>
               <a:t>3</a:t>
             </a:r>
@@ -12071,9 +12071,9 @@
                 <a:solidFill>
                   <a:srgbClr val="7A869C"/>
                 </a:solidFill>
-                <a:latin typeface="나눔고딕코딩"/>
-                <a:ea typeface="나눔고딕코딩"/>
-                <a:cs typeface="나눔고딕코딩"/>
+                <a:latin typeface="D2Coding"/>
+                <a:ea typeface="D2Coding"/>
+                <a:cs typeface="D2Coding"/>
               </a:rPr>
               <a:t>4</a:t>
             </a:r>
@@ -12089,9 +12089,9 @@
                 <a:solidFill>
                   <a:srgbClr val="7A869C"/>
                 </a:solidFill>
-                <a:latin typeface="나눔고딕코딩"/>
-                <a:ea typeface="나눔고딕코딩"/>
-                <a:cs typeface="나눔고딕코딩"/>
+                <a:latin typeface="D2Coding"/>
+                <a:ea typeface="D2Coding"/>
+                <a:cs typeface="D2Coding"/>
               </a:rPr>
               <a:t>5</a:t>
             </a:r>
@@ -12107,9 +12107,9 @@
                 <a:solidFill>
                   <a:srgbClr val="7A869C"/>
                 </a:solidFill>
-                <a:latin typeface="나눔고딕코딩"/>
-                <a:ea typeface="나눔고딕코딩"/>
-                <a:cs typeface="나눔고딕코딩"/>
+                <a:latin typeface="D2Coding"/>
+                <a:ea typeface="D2Coding"/>
+                <a:cs typeface="D2Coding"/>
               </a:rPr>
               <a:t>6</a:t>
             </a:r>
@@ -12125,9 +12125,9 @@
                 <a:solidFill>
                   <a:srgbClr val="7A869C"/>
                 </a:solidFill>
-                <a:latin typeface="나눔고딕코딩"/>
-                <a:ea typeface="나눔고딕코딩"/>
-                <a:cs typeface="나눔고딕코딩"/>
+                <a:latin typeface="D2Coding"/>
+                <a:ea typeface="D2Coding"/>
+                <a:cs typeface="D2Coding"/>
               </a:rPr>
               <a:t>7</a:t>
             </a:r>
@@ -12143,9 +12143,9 @@
                 <a:solidFill>
                   <a:srgbClr val="7A869C"/>
                 </a:solidFill>
-                <a:latin typeface="나눔고딕코딩"/>
-                <a:ea typeface="나눔고딕코딩"/>
-                <a:cs typeface="나눔고딕코딩"/>
+                <a:latin typeface="D2Coding"/>
+                <a:ea typeface="D2Coding"/>
+                <a:cs typeface="D2Coding"/>
               </a:rPr>
               <a:t>8</a:t>
             </a:r>
@@ -12161,9 +12161,9 @@
                 <a:solidFill>
                   <a:srgbClr val="7A869C"/>
                 </a:solidFill>
-                <a:latin typeface="나눔고딕코딩"/>
-                <a:ea typeface="나눔고딕코딩"/>
-                <a:cs typeface="나눔고딕코딩"/>
+                <a:latin typeface="D2Coding"/>
+                <a:ea typeface="D2Coding"/>
+                <a:cs typeface="D2Coding"/>
               </a:rPr>
               <a:t>9</a:t>
             </a:r>
@@ -12202,9 +12202,9 @@
                 <a:solidFill>
                   <a:srgbClr val="E6EAF2"/>
                 </a:solidFill>
-                <a:latin typeface="나눔고딕코딩"/>
-                <a:ea typeface="나눔고딕코딩"/>
-                <a:cs typeface="나눔고딕코딩"/>
+                <a:latin typeface="D2Coding"/>
+                <a:ea typeface="D2Coding"/>
+                <a:cs typeface="D2Coding"/>
               </a:rPr>
               <a:t>CREATE TABLE orders (</a:t>
             </a:r>
@@ -12220,9 +12220,9 @@
                 <a:solidFill>
                   <a:srgbClr val="E6EAF2"/>
                 </a:solidFill>
-                <a:latin typeface="나눔고딕코딩"/>
-                <a:ea typeface="나눔고딕코딩"/>
-                <a:cs typeface="나눔고딕코딩"/>
+                <a:latin typeface="D2Coding"/>
+                <a:ea typeface="D2Coding"/>
+                <a:cs typeface="D2Coding"/>
               </a:rPr>
               <a:t>  order_id   INT         PRIMARY KEY AUTO_INCREMENT,</a:t>
             </a:r>
@@ -12238,9 +12238,9 @@
                 <a:solidFill>
                   <a:srgbClr val="E6EAF2"/>
                 </a:solidFill>
-                <a:latin typeface="나눔고딕코딩"/>
-                <a:ea typeface="나눔고딕코딩"/>
-                <a:cs typeface="나눔고딕코딩"/>
+                <a:latin typeface="D2Coding"/>
+                <a:ea typeface="D2Coding"/>
+                <a:cs typeface="D2Coding"/>
               </a:rPr>
               <a:t>  cust_id    CHAR(4)     NOT NULL,          -- 고객 정보는 번호로만 참조</a:t>
             </a:r>
@@ -12256,9 +12256,9 @@
                 <a:solidFill>
                   <a:srgbClr val="E6EAF2"/>
                 </a:solidFill>
-                <a:latin typeface="나눔고딕코딩"/>
-                <a:ea typeface="나눔고딕코딩"/>
-                <a:cs typeface="나눔고딕코딩"/>
+                <a:latin typeface="D2Coding"/>
+                <a:ea typeface="D2Coding"/>
+                <a:cs typeface="D2Coding"/>
               </a:rPr>
               <a:t>  emp_id     CHAR(4),</a:t>
             </a:r>
@@ -12274,9 +12274,9 @@
                 <a:solidFill>
                   <a:srgbClr val="E6EAF2"/>
                 </a:solidFill>
-                <a:latin typeface="나눔고딕코딩"/>
-                <a:ea typeface="나눔고딕코딩"/>
-                <a:cs typeface="나눔고딕코딩"/>
+                <a:latin typeface="D2Coding"/>
+                <a:ea typeface="D2Coding"/>
+                <a:cs typeface="D2Coding"/>
               </a:rPr>
               <a:t>  order_date DATE        NOT NULL,</a:t>
             </a:r>
@@ -12292,9 +12292,9 @@
                 <a:solidFill>
                   <a:srgbClr val="E6EAF2"/>
                 </a:solidFill>
-                <a:latin typeface="나눔고딕코딩"/>
-                <a:ea typeface="나눔고딕코딩"/>
-                <a:cs typeface="나눔고딕코딩"/>
+                <a:latin typeface="D2Coding"/>
+                <a:ea typeface="D2Coding"/>
+                <a:cs typeface="D2Coding"/>
               </a:rPr>
               <a:t>  status     VARCHAR(10) NOT NULL DEFAULT '주문접수',</a:t>
             </a:r>
@@ -12310,9 +12310,9 @@
                 <a:solidFill>
                   <a:srgbClr val="E6EAF2"/>
                 </a:solidFill>
-                <a:latin typeface="나눔고딕코딩"/>
-                <a:ea typeface="나눔고딕코딩"/>
-                <a:cs typeface="나눔고딕코딩"/>
+                <a:latin typeface="D2Coding"/>
+                <a:ea typeface="D2Coding"/>
+                <a:cs typeface="D2Coding"/>
               </a:rPr>
               <a:t>  FOREIGN KEY (cust_id) REFERENCES customers(cust_id),</a:t>
             </a:r>
@@ -12328,9 +12328,9 @@
                 <a:solidFill>
                   <a:srgbClr val="E6EAF2"/>
                 </a:solidFill>
-                <a:latin typeface="나눔고딕코딩"/>
-                <a:ea typeface="나눔고딕코딩"/>
-                <a:cs typeface="나눔고딕코딩"/>
+                <a:latin typeface="D2Coding"/>
+                <a:ea typeface="D2Coding"/>
+                <a:cs typeface="D2Coding"/>
               </a:rPr>
               <a:t>  FOREIGN KEY (emp_id)  REFERENCES employees(emp_id)</a:t>
             </a:r>
@@ -12346,9 +12346,9 @@
                 <a:solidFill>
                   <a:srgbClr val="E6EAF2"/>
                 </a:solidFill>
-                <a:latin typeface="나눔고딕코딩"/>
-                <a:ea typeface="나눔고딕코딩"/>
-                <a:cs typeface="나눔고딕코딩"/>
+                <a:latin typeface="D2Coding"/>
+                <a:ea typeface="D2Coding"/>
+                <a:cs typeface="D2Coding"/>
               </a:rPr>
               <a:t>);</a:t>
             </a:r>
@@ -12852,9 +12852,9 @@
                 <a:solidFill>
                   <a:srgbClr val="7A869C"/>
                 </a:solidFill>
-                <a:latin typeface="나눔고딕코딩"/>
-                <a:ea typeface="나눔고딕코딩"/>
-                <a:cs typeface="나눔고딕코딩"/>
+                <a:latin typeface="D2Coding"/>
+                <a:ea typeface="D2Coding"/>
+                <a:cs typeface="D2Coding"/>
               </a:rPr>
               <a:t>11</a:t>
             </a:r>
@@ -12870,9 +12870,9 @@
                 <a:solidFill>
                   <a:srgbClr val="7A869C"/>
                 </a:solidFill>
-                <a:latin typeface="나눔고딕코딩"/>
-                <a:ea typeface="나눔고딕코딩"/>
-                <a:cs typeface="나눔고딕코딩"/>
+                <a:latin typeface="D2Coding"/>
+                <a:ea typeface="D2Coding"/>
+                <a:cs typeface="D2Coding"/>
               </a:rPr>
               <a:t>12</a:t>
             </a:r>
@@ -12888,9 +12888,9 @@
                 <a:solidFill>
                   <a:srgbClr val="7A869C"/>
                 </a:solidFill>
-                <a:latin typeface="나눔고딕코딩"/>
-                <a:ea typeface="나눔고딕코딩"/>
-                <a:cs typeface="나눔고딕코딩"/>
+                <a:latin typeface="D2Coding"/>
+                <a:ea typeface="D2Coding"/>
+                <a:cs typeface="D2Coding"/>
               </a:rPr>
               <a:t>13</a:t>
             </a:r>
@@ -12906,9 +12906,9 @@
                 <a:solidFill>
                   <a:srgbClr val="7A869C"/>
                 </a:solidFill>
-                <a:latin typeface="나눔고딕코딩"/>
-                <a:ea typeface="나눔고딕코딩"/>
-                <a:cs typeface="나눔고딕코딩"/>
+                <a:latin typeface="D2Coding"/>
+                <a:ea typeface="D2Coding"/>
+                <a:cs typeface="D2Coding"/>
               </a:rPr>
               <a:t>14</a:t>
             </a:r>
@@ -12924,9 +12924,9 @@
                 <a:solidFill>
                   <a:srgbClr val="7A869C"/>
                 </a:solidFill>
-                <a:latin typeface="나눔고딕코딩"/>
-                <a:ea typeface="나눔고딕코딩"/>
-                <a:cs typeface="나눔고딕코딩"/>
+                <a:latin typeface="D2Coding"/>
+                <a:ea typeface="D2Coding"/>
+                <a:cs typeface="D2Coding"/>
               </a:rPr>
               <a:t>15</a:t>
             </a:r>
@@ -12942,9 +12942,9 @@
                 <a:solidFill>
                   <a:srgbClr val="7A869C"/>
                 </a:solidFill>
-                <a:latin typeface="나눔고딕코딩"/>
-                <a:ea typeface="나눔고딕코딩"/>
-                <a:cs typeface="나눔고딕코딩"/>
+                <a:latin typeface="D2Coding"/>
+                <a:ea typeface="D2Coding"/>
+                <a:cs typeface="D2Coding"/>
               </a:rPr>
               <a:t>16</a:t>
             </a:r>
@@ -12960,9 +12960,9 @@
                 <a:solidFill>
                   <a:srgbClr val="7A869C"/>
                 </a:solidFill>
-                <a:latin typeface="나눔고딕코딩"/>
-                <a:ea typeface="나눔고딕코딩"/>
-                <a:cs typeface="나눔고딕코딩"/>
+                <a:latin typeface="D2Coding"/>
+                <a:ea typeface="D2Coding"/>
+                <a:cs typeface="D2Coding"/>
               </a:rPr>
               <a:t>17</a:t>
             </a:r>
@@ -12978,9 +12978,9 @@
                 <a:solidFill>
                   <a:srgbClr val="7A869C"/>
                 </a:solidFill>
-                <a:latin typeface="나눔고딕코딩"/>
-                <a:ea typeface="나눔고딕코딩"/>
-                <a:cs typeface="나눔고딕코딩"/>
+                <a:latin typeface="D2Coding"/>
+                <a:ea typeface="D2Coding"/>
+                <a:cs typeface="D2Coding"/>
               </a:rPr>
               <a:t>18</a:t>
             </a:r>
@@ -12996,9 +12996,9 @@
                 <a:solidFill>
                   <a:srgbClr val="7A869C"/>
                 </a:solidFill>
-                <a:latin typeface="나눔고딕코딩"/>
-                <a:ea typeface="나눔고딕코딩"/>
-                <a:cs typeface="나눔고딕코딩"/>
+                <a:latin typeface="D2Coding"/>
+                <a:ea typeface="D2Coding"/>
+                <a:cs typeface="D2Coding"/>
               </a:rPr>
               <a:t>19</a:t>
             </a:r>
@@ -13037,9 +13037,9 @@
                 <a:solidFill>
                   <a:srgbClr val="E6EAF2"/>
                 </a:solidFill>
-                <a:latin typeface="나눔고딕코딩"/>
-                <a:ea typeface="나눔고딕코딩"/>
-                <a:cs typeface="나눔고딕코딩"/>
+                <a:latin typeface="D2Coding"/>
+                <a:ea typeface="D2Coding"/>
+                <a:cs typeface="D2Coding"/>
               </a:rPr>
               <a:t>CREATE TABLE order_items (</a:t>
             </a:r>
@@ -13055,9 +13055,9 @@
                 <a:solidFill>
                   <a:srgbClr val="E6EAF2"/>
                 </a:solidFill>
-                <a:latin typeface="나눔고딕코딩"/>
-                <a:ea typeface="나눔고딕코딩"/>
-                <a:cs typeface="나눔고딕코딩"/>
+                <a:latin typeface="D2Coding"/>
+                <a:ea typeface="D2Coding"/>
+                <a:cs typeface="D2Coding"/>
               </a:rPr>
               <a:t>  order_id   INT     NOT NULL,</a:t>
             </a:r>
@@ -13073,9 +13073,9 @@
                 <a:solidFill>
                   <a:srgbClr val="E6EAF2"/>
                 </a:solidFill>
-                <a:latin typeface="나눔고딕코딩"/>
-                <a:ea typeface="나눔고딕코딩"/>
-                <a:cs typeface="나눔고딕코딩"/>
+                <a:latin typeface="D2Coding"/>
+                <a:ea typeface="D2Coding"/>
+                <a:cs typeface="D2Coding"/>
               </a:rPr>
               <a:t>  prod_id    CHAR(4) NOT NULL,</a:t>
             </a:r>
@@ -13091,9 +13091,9 @@
                 <a:solidFill>
                   <a:srgbClr val="E6EAF2"/>
                 </a:solidFill>
-                <a:latin typeface="나눔고딕코딩"/>
-                <a:ea typeface="나눔고딕코딩"/>
-                <a:cs typeface="나눔고딕코딩"/>
+                <a:latin typeface="D2Coding"/>
+                <a:ea typeface="D2Coding"/>
+                <a:cs typeface="D2Coding"/>
               </a:rPr>
               <a:t>  qty        INT     NOT NULL CHECK (qty &gt; 0),</a:t>
             </a:r>
@@ -13109,9 +13109,9 @@
                 <a:solidFill>
                   <a:srgbClr val="E6EAF2"/>
                 </a:solidFill>
-                <a:latin typeface="나눔고딕코딩"/>
-                <a:ea typeface="나눔고딕코딩"/>
-                <a:cs typeface="나눔고딕코딩"/>
+                <a:latin typeface="D2Coding"/>
+                <a:ea typeface="D2Coding"/>
+                <a:cs typeface="D2Coding"/>
               </a:rPr>
               <a:t>  unit_price INT     NOT NULL,              -- 주문 시점 단가 (7절 참고)</a:t>
             </a:r>
@@ -13127,9 +13127,9 @@
                 <a:solidFill>
                   <a:srgbClr val="E6EAF2"/>
                 </a:solidFill>
-                <a:latin typeface="나눔고딕코딩"/>
-                <a:ea typeface="나눔고딕코딩"/>
-                <a:cs typeface="나눔고딕코딩"/>
+                <a:latin typeface="D2Coding"/>
+                <a:ea typeface="D2Coding"/>
+                <a:cs typeface="D2Coding"/>
               </a:rPr>
               <a:t>  PRIMARY KEY (order_id, prod_id),          -- 복합키: 완전 종속 속성만 남는다</a:t>
             </a:r>
@@ -13145,9 +13145,9 @@
                 <a:solidFill>
                   <a:srgbClr val="E6EAF2"/>
                 </a:solidFill>
-                <a:latin typeface="나눔고딕코딩"/>
-                <a:ea typeface="나눔고딕코딩"/>
-                <a:cs typeface="나눔고딕코딩"/>
+                <a:latin typeface="D2Coding"/>
+                <a:ea typeface="D2Coding"/>
+                <a:cs typeface="D2Coding"/>
               </a:rPr>
               <a:t>  FOREIGN KEY (order_id) REFERENCES orders(order_id),</a:t>
             </a:r>
@@ -13163,9 +13163,9 @@
                 <a:solidFill>
                   <a:srgbClr val="E6EAF2"/>
                 </a:solidFill>
-                <a:latin typeface="나눔고딕코딩"/>
-                <a:ea typeface="나눔고딕코딩"/>
-                <a:cs typeface="나눔고딕코딩"/>
+                <a:latin typeface="D2Coding"/>
+                <a:ea typeface="D2Coding"/>
+                <a:cs typeface="D2Coding"/>
               </a:rPr>
               <a:t>  FOREIGN KEY (prod_id)  REFERENCES products(prod_id)</a:t>
             </a:r>
@@ -13181,9 +13181,9 @@
                 <a:solidFill>
                   <a:srgbClr val="E6EAF2"/>
                 </a:solidFill>
-                <a:latin typeface="나눔고딕코딩"/>
-                <a:ea typeface="나눔고딕코딩"/>
-                <a:cs typeface="나눔고딕코딩"/>
+                <a:latin typeface="D2Coding"/>
+                <a:ea typeface="D2Coding"/>
+                <a:cs typeface="D2Coding"/>
               </a:rPr>
               <a:t>);</a:t>
             </a:r>
